--- a/~sasano/lecture/proglang/26/proglang8-hosoku.pptx
+++ b/~sasano/lecture/proglang/26/proglang8-hosoku.pptx
@@ -141,6 +141,22 @@
       </a:defRPr>
     </a:lvl9pPr>
   </p:defaultTextStyle>
+  <p:extLst>
+    <p:ext uri="{EFAFB233-063F-42B5-8137-9DF3F51BA10A}">
+      <p15:sldGuideLst xmlns:p15="http://schemas.microsoft.com/office/powerpoint/2012/main">
+        <p15:guide id="1" orient="horz" pos="2160">
+          <p15:clr>
+            <a:srgbClr val="A4A3A4"/>
+          </p15:clr>
+        </p15:guide>
+        <p15:guide id="2" pos="2880">
+          <p15:clr>
+            <a:srgbClr val="A4A3A4"/>
+          </p15:clr>
+        </p15:guide>
+      </p15:sldGuideLst>
+    </p:ext>
+  </p:extLst>
 </p:presentation>
 </file>
 
@@ -526,14 +542,14 @@
           </a:ln>
           <a:extLst>
             <a:ext uri="{909E8E84-426E-40dd-AFC4-6F175D3DCCD1}">
-              <a14:hiddenFill xmlns:a14="http://schemas.microsoft.com/office/drawing/2010/main">
+              <a14:hiddenFill xmlns:a14="http://schemas.microsoft.com/office/drawing/2010/main" xmlns="">
                 <a:solidFill>
                   <a:srgbClr val="FFFFFF"/>
                 </a:solidFill>
               </a14:hiddenFill>
             </a:ext>
             <a:ext uri="{FAA26D3D-D897-4be2-8F04-BA451C77F1D7}">
-              <ma14:placeholderFlag xmlns:ma14="http://schemas.microsoft.com/office/mac/drawingml/2011/main" val="1"/>
+              <ma14:placeholderFlag xmlns:ma14="http://schemas.microsoft.com/office/mac/drawingml/2011/main" xmlns="" val="1"/>
             </a:ext>
           </a:extLst>
         </p:spPr>
@@ -574,67 +590,67 @@
           <a:p>
             <a:pPr lvl="0"/>
             <a:r>
-              <a:rPr lang="ja-JP" altLang="en-US" noProof="0" smtClean="0"/>
+              <a:rPr lang="ja-JP" altLang="en-US" noProof="0"/>
               <a:t>マスタ テキストの書式設定</a:t>
             </a:r>
           </a:p>
           <a:p>
             <a:pPr lvl="1"/>
             <a:r>
-              <a:rPr lang="ja-JP" altLang="en-US" noProof="0" smtClean="0"/>
+              <a:rPr lang="ja-JP" altLang="en-US" noProof="0"/>
               <a:t>第 </a:t>
             </a:r>
             <a:r>
-              <a:rPr lang="en-US" altLang="ja-JP" noProof="0" smtClean="0"/>
+              <a:rPr lang="en-US" altLang="ja-JP" noProof="0"/>
               <a:t>2 </a:t>
             </a:r>
             <a:r>
-              <a:rPr lang="ja-JP" altLang="en-US" noProof="0" smtClean="0"/>
+              <a:rPr lang="ja-JP" altLang="en-US" noProof="0"/>
               <a:t>レベル</a:t>
             </a:r>
           </a:p>
           <a:p>
             <a:pPr lvl="2"/>
             <a:r>
-              <a:rPr lang="ja-JP" altLang="en-US" noProof="0" smtClean="0"/>
+              <a:rPr lang="ja-JP" altLang="en-US" noProof="0"/>
               <a:t>第 </a:t>
             </a:r>
             <a:r>
-              <a:rPr lang="en-US" altLang="ja-JP" noProof="0" smtClean="0"/>
+              <a:rPr lang="en-US" altLang="ja-JP" noProof="0"/>
               <a:t>3 </a:t>
             </a:r>
             <a:r>
-              <a:rPr lang="ja-JP" altLang="en-US" noProof="0" smtClean="0"/>
+              <a:rPr lang="ja-JP" altLang="en-US" noProof="0"/>
               <a:t>レベル</a:t>
             </a:r>
           </a:p>
           <a:p>
             <a:pPr lvl="3"/>
             <a:r>
-              <a:rPr lang="ja-JP" altLang="en-US" noProof="0" smtClean="0"/>
+              <a:rPr lang="ja-JP" altLang="en-US" noProof="0"/>
               <a:t>第 </a:t>
             </a:r>
             <a:r>
-              <a:rPr lang="en-US" altLang="ja-JP" noProof="0" smtClean="0"/>
+              <a:rPr lang="en-US" altLang="ja-JP" noProof="0"/>
               <a:t>4 </a:t>
             </a:r>
             <a:r>
-              <a:rPr lang="ja-JP" altLang="en-US" noProof="0" smtClean="0"/>
+              <a:rPr lang="ja-JP" altLang="en-US" noProof="0"/>
               <a:t>レベル</a:t>
             </a:r>
           </a:p>
           <a:p>
             <a:pPr lvl="4"/>
             <a:r>
-              <a:rPr lang="ja-JP" altLang="en-US" noProof="0" smtClean="0"/>
+              <a:rPr lang="ja-JP" altLang="en-US" noProof="0"/>
               <a:t>第 </a:t>
             </a:r>
             <a:r>
-              <a:rPr lang="en-US" altLang="ja-JP" noProof="0" smtClean="0"/>
+              <a:rPr lang="en-US" altLang="ja-JP" noProof="0"/>
               <a:t>5 </a:t>
             </a:r>
             <a:r>
-              <a:rPr lang="ja-JP" altLang="en-US" noProof="0" smtClean="0"/>
+              <a:rPr lang="ja-JP" altLang="en-US" noProof="0"/>
               <a:t>レベル</a:t>
             </a:r>
           </a:p>
@@ -905,14 +921,14 @@
           <a:ln/>
           <a:extLst>
             <a:ext uri="{909E8E84-426E-40dd-AFC4-6F175D3DCCD1}">
-              <a14:hiddenFill xmlns:a14="http://schemas.microsoft.com/office/drawing/2010/main">
+              <a14:hiddenFill xmlns:a14="http://schemas.microsoft.com/office/drawing/2010/main" xmlns="">
                 <a:solidFill>
                   <a:srgbClr val="FFFFFF"/>
                 </a:solidFill>
               </a14:hiddenFill>
             </a:ext>
             <a:ext uri="{91240B29-F687-4f45-9708-019B960494DF}">
-              <a14:hiddenLine xmlns:a14="http://schemas.microsoft.com/office/drawing/2010/main" w="9525">
+              <a14:hiddenLine xmlns:a14="http://schemas.microsoft.com/office/drawing/2010/main" xmlns="" w="9525">
                 <a:solidFill>
                   <a:srgbClr val="000000"/>
                 </a:solidFill>
@@ -1072,14 +1088,14 @@
           <a:ln/>
           <a:extLst>
             <a:ext uri="{909E8E84-426E-40dd-AFC4-6F175D3DCCD1}">
-              <a14:hiddenFill xmlns:a14="http://schemas.microsoft.com/office/drawing/2010/main">
+              <a14:hiddenFill xmlns:a14="http://schemas.microsoft.com/office/drawing/2010/main" xmlns="">
                 <a:solidFill>
                   <a:srgbClr val="FFFFFF"/>
                 </a:solidFill>
               </a14:hiddenFill>
             </a:ext>
             <a:ext uri="{91240B29-F687-4f45-9708-019B960494DF}">
-              <a14:hiddenLine xmlns:a14="http://schemas.microsoft.com/office/drawing/2010/main" w="9525">
+              <a14:hiddenLine xmlns:a14="http://schemas.microsoft.com/office/drawing/2010/main" xmlns="" w="9525">
                 <a:solidFill>
                   <a:srgbClr val="000000"/>
                 </a:solidFill>
@@ -1089,7 +1105,7 @@
               </a14:hiddenLine>
             </a:ext>
             <a:ext uri="{FAA26D3D-D897-4be2-8F04-BA451C77F1D7}">
-              <ma14:placeholderFlag xmlns:ma14="http://schemas.microsoft.com/office/mac/drawingml/2011/main" val="1"/>
+              <ma14:placeholderFlag xmlns:ma14="http://schemas.microsoft.com/office/mac/drawingml/2011/main" xmlns="" val="1"/>
             </a:ext>
           </a:extLst>
         </p:spPr>
@@ -1150,10 +1166,9 @@
           <a:lstStyle/>
           <a:p>
             <a:r>
-              <a:rPr lang="ja-JP" altLang="en-US" smtClean="0"/>
+              <a:rPr lang="ja-JP" altLang="en-US"/>
               <a:t>マスタ タイトルの書式設定</a:t>
             </a:r>
-            <a:endParaRPr lang="ja-JP" altLang="en-US"/>
           </a:p>
         </p:txBody>
       </p:sp>
@@ -1215,10 +1230,9 @@
           </a:lstStyle>
           <a:p>
             <a:r>
-              <a:rPr lang="ja-JP" altLang="en-US" smtClean="0"/>
+              <a:rPr lang="ja-JP" altLang="en-US"/>
               <a:t>マスタ サブタイトルの書式設定</a:t>
             </a:r>
-            <a:endParaRPr lang="ja-JP" altLang="en-US"/>
           </a:p>
         </p:txBody>
       </p:sp>
@@ -1359,10 +1373,9 @@
           <a:lstStyle/>
           <a:p>
             <a:r>
-              <a:rPr lang="ja-JP" altLang="en-US" smtClean="0"/>
+              <a:rPr lang="ja-JP" altLang="en-US"/>
               <a:t>マスタ タイトルの書式設定</a:t>
             </a:r>
-            <a:endParaRPr lang="ja-JP" altLang="en-US"/>
           </a:p>
         </p:txBody>
       </p:sp>
@@ -1383,70 +1396,69 @@
           <a:p>
             <a:pPr lvl="0"/>
             <a:r>
-              <a:rPr lang="ja-JP" altLang="en-US" smtClean="0"/>
+              <a:rPr lang="ja-JP" altLang="en-US"/>
               <a:t>マスタ テキストの書式設定</a:t>
             </a:r>
           </a:p>
           <a:p>
             <a:pPr lvl="1"/>
             <a:r>
-              <a:rPr lang="ja-JP" altLang="en-US" smtClean="0"/>
+              <a:rPr lang="ja-JP" altLang="en-US"/>
               <a:t>第 </a:t>
             </a:r>
             <a:r>
-              <a:rPr lang="en-US" altLang="ja-JP" smtClean="0"/>
+              <a:rPr lang="en-US" altLang="ja-JP"/>
               <a:t>2 </a:t>
             </a:r>
             <a:r>
-              <a:rPr lang="ja-JP" altLang="en-US" smtClean="0"/>
+              <a:rPr lang="ja-JP" altLang="en-US"/>
               <a:t>レベル</a:t>
             </a:r>
           </a:p>
           <a:p>
             <a:pPr lvl="2"/>
             <a:r>
-              <a:rPr lang="ja-JP" altLang="en-US" smtClean="0"/>
+              <a:rPr lang="ja-JP" altLang="en-US"/>
               <a:t>第 </a:t>
             </a:r>
             <a:r>
-              <a:rPr lang="en-US" altLang="ja-JP" smtClean="0"/>
+              <a:rPr lang="en-US" altLang="ja-JP"/>
               <a:t>3 </a:t>
             </a:r>
             <a:r>
-              <a:rPr lang="ja-JP" altLang="en-US" smtClean="0"/>
+              <a:rPr lang="ja-JP" altLang="en-US"/>
               <a:t>レベル</a:t>
             </a:r>
           </a:p>
           <a:p>
             <a:pPr lvl="3"/>
             <a:r>
-              <a:rPr lang="ja-JP" altLang="en-US" smtClean="0"/>
+              <a:rPr lang="ja-JP" altLang="en-US"/>
               <a:t>第 </a:t>
             </a:r>
             <a:r>
-              <a:rPr lang="en-US" altLang="ja-JP" smtClean="0"/>
+              <a:rPr lang="en-US" altLang="ja-JP"/>
               <a:t>4 </a:t>
             </a:r>
             <a:r>
-              <a:rPr lang="ja-JP" altLang="en-US" smtClean="0"/>
+              <a:rPr lang="ja-JP" altLang="en-US"/>
               <a:t>レベル</a:t>
             </a:r>
           </a:p>
           <a:p>
             <a:pPr lvl="4"/>
             <a:r>
-              <a:rPr lang="ja-JP" altLang="en-US" smtClean="0"/>
+              <a:rPr lang="ja-JP" altLang="en-US"/>
               <a:t>第 </a:t>
             </a:r>
             <a:r>
-              <a:rPr lang="en-US" altLang="ja-JP" smtClean="0"/>
+              <a:rPr lang="en-US" altLang="ja-JP"/>
               <a:t>5 </a:t>
             </a:r>
             <a:r>
-              <a:rPr lang="ja-JP" altLang="en-US" smtClean="0"/>
+              <a:rPr lang="ja-JP" altLang="en-US"/>
               <a:t>レベル</a:t>
             </a:r>
-            <a:endParaRPr lang="ja-JP" altLang="en-US"/>
           </a:p>
         </p:txBody>
       </p:sp>
@@ -1592,10 +1604,9 @@
           <a:lstStyle/>
           <a:p>
             <a:r>
-              <a:rPr lang="ja-JP" altLang="en-US" smtClean="0"/>
+              <a:rPr lang="ja-JP" altLang="en-US"/>
               <a:t>マスタ タイトルの書式設定</a:t>
             </a:r>
-            <a:endParaRPr lang="ja-JP" altLang="en-US"/>
           </a:p>
         </p:txBody>
       </p:sp>
@@ -1621,70 +1632,69 @@
           <a:p>
             <a:pPr lvl="0"/>
             <a:r>
-              <a:rPr lang="ja-JP" altLang="en-US" smtClean="0"/>
+              <a:rPr lang="ja-JP" altLang="en-US"/>
               <a:t>マスタ テキストの書式設定</a:t>
             </a:r>
           </a:p>
           <a:p>
             <a:pPr lvl="1"/>
             <a:r>
-              <a:rPr lang="ja-JP" altLang="en-US" smtClean="0"/>
+              <a:rPr lang="ja-JP" altLang="en-US"/>
               <a:t>第 </a:t>
             </a:r>
             <a:r>
-              <a:rPr lang="en-US" altLang="ja-JP" smtClean="0"/>
+              <a:rPr lang="en-US" altLang="ja-JP"/>
               <a:t>2 </a:t>
             </a:r>
             <a:r>
-              <a:rPr lang="ja-JP" altLang="en-US" smtClean="0"/>
+              <a:rPr lang="ja-JP" altLang="en-US"/>
               <a:t>レベル</a:t>
             </a:r>
           </a:p>
           <a:p>
             <a:pPr lvl="2"/>
             <a:r>
-              <a:rPr lang="ja-JP" altLang="en-US" smtClean="0"/>
+              <a:rPr lang="ja-JP" altLang="en-US"/>
               <a:t>第 </a:t>
             </a:r>
             <a:r>
-              <a:rPr lang="en-US" altLang="ja-JP" smtClean="0"/>
+              <a:rPr lang="en-US" altLang="ja-JP"/>
               <a:t>3 </a:t>
             </a:r>
             <a:r>
-              <a:rPr lang="ja-JP" altLang="en-US" smtClean="0"/>
+              <a:rPr lang="ja-JP" altLang="en-US"/>
               <a:t>レベル</a:t>
             </a:r>
           </a:p>
           <a:p>
             <a:pPr lvl="3"/>
             <a:r>
-              <a:rPr lang="ja-JP" altLang="en-US" smtClean="0"/>
+              <a:rPr lang="ja-JP" altLang="en-US"/>
               <a:t>第 </a:t>
             </a:r>
             <a:r>
-              <a:rPr lang="en-US" altLang="ja-JP" smtClean="0"/>
+              <a:rPr lang="en-US" altLang="ja-JP"/>
               <a:t>4 </a:t>
             </a:r>
             <a:r>
-              <a:rPr lang="ja-JP" altLang="en-US" smtClean="0"/>
+              <a:rPr lang="ja-JP" altLang="en-US"/>
               <a:t>レベル</a:t>
             </a:r>
           </a:p>
           <a:p>
             <a:pPr lvl="4"/>
             <a:r>
-              <a:rPr lang="ja-JP" altLang="en-US" smtClean="0"/>
+              <a:rPr lang="ja-JP" altLang="en-US"/>
               <a:t>第 </a:t>
             </a:r>
             <a:r>
-              <a:rPr lang="en-US" altLang="ja-JP" smtClean="0"/>
+              <a:rPr lang="en-US" altLang="ja-JP"/>
               <a:t>5 </a:t>
             </a:r>
             <a:r>
-              <a:rPr lang="ja-JP" altLang="en-US" smtClean="0"/>
+              <a:rPr lang="ja-JP" altLang="en-US"/>
               <a:t>レベル</a:t>
             </a:r>
-            <a:endParaRPr lang="ja-JP" altLang="en-US"/>
           </a:p>
         </p:txBody>
       </p:sp>
@@ -1825,10 +1835,9 @@
           <a:lstStyle/>
           <a:p>
             <a:r>
-              <a:rPr lang="ja-JP" altLang="en-US" smtClean="0"/>
+              <a:rPr lang="ja-JP" altLang="en-US"/>
               <a:t>マスタ タイトルの書式設定</a:t>
             </a:r>
-            <a:endParaRPr lang="ja-JP" altLang="en-US"/>
           </a:p>
         </p:txBody>
       </p:sp>
@@ -1849,70 +1858,69 @@
           <a:p>
             <a:pPr lvl="0"/>
             <a:r>
-              <a:rPr lang="ja-JP" altLang="en-US" smtClean="0"/>
+              <a:rPr lang="ja-JP" altLang="en-US"/>
               <a:t>マスタ テキストの書式設定</a:t>
             </a:r>
           </a:p>
           <a:p>
             <a:pPr lvl="1"/>
             <a:r>
-              <a:rPr lang="ja-JP" altLang="en-US" smtClean="0"/>
+              <a:rPr lang="ja-JP" altLang="en-US"/>
               <a:t>第 </a:t>
             </a:r>
             <a:r>
-              <a:rPr lang="en-US" altLang="ja-JP" smtClean="0"/>
+              <a:rPr lang="en-US" altLang="ja-JP"/>
               <a:t>2 </a:t>
             </a:r>
             <a:r>
-              <a:rPr lang="ja-JP" altLang="en-US" smtClean="0"/>
+              <a:rPr lang="ja-JP" altLang="en-US"/>
               <a:t>レベル</a:t>
             </a:r>
           </a:p>
           <a:p>
             <a:pPr lvl="2"/>
             <a:r>
-              <a:rPr lang="ja-JP" altLang="en-US" smtClean="0"/>
+              <a:rPr lang="ja-JP" altLang="en-US"/>
               <a:t>第 </a:t>
             </a:r>
             <a:r>
-              <a:rPr lang="en-US" altLang="ja-JP" smtClean="0"/>
+              <a:rPr lang="en-US" altLang="ja-JP"/>
               <a:t>3 </a:t>
             </a:r>
             <a:r>
-              <a:rPr lang="ja-JP" altLang="en-US" smtClean="0"/>
+              <a:rPr lang="ja-JP" altLang="en-US"/>
               <a:t>レベル</a:t>
             </a:r>
           </a:p>
           <a:p>
             <a:pPr lvl="3"/>
             <a:r>
-              <a:rPr lang="ja-JP" altLang="en-US" smtClean="0"/>
+              <a:rPr lang="ja-JP" altLang="en-US"/>
               <a:t>第 </a:t>
             </a:r>
             <a:r>
-              <a:rPr lang="en-US" altLang="ja-JP" smtClean="0"/>
+              <a:rPr lang="en-US" altLang="ja-JP"/>
               <a:t>4 </a:t>
             </a:r>
             <a:r>
-              <a:rPr lang="ja-JP" altLang="en-US" smtClean="0"/>
+              <a:rPr lang="ja-JP" altLang="en-US"/>
               <a:t>レベル</a:t>
             </a:r>
           </a:p>
           <a:p>
             <a:pPr lvl="4"/>
             <a:r>
-              <a:rPr lang="ja-JP" altLang="en-US" smtClean="0"/>
+              <a:rPr lang="ja-JP" altLang="en-US"/>
               <a:t>第 </a:t>
             </a:r>
             <a:r>
-              <a:rPr lang="en-US" altLang="ja-JP" smtClean="0"/>
+              <a:rPr lang="en-US" altLang="ja-JP"/>
               <a:t>5 </a:t>
             </a:r>
             <a:r>
-              <a:rPr lang="ja-JP" altLang="en-US" smtClean="0"/>
+              <a:rPr lang="ja-JP" altLang="en-US"/>
               <a:t>レベル</a:t>
             </a:r>
-            <a:endParaRPr lang="ja-JP" altLang="en-US"/>
           </a:p>
         </p:txBody>
       </p:sp>
@@ -2062,10 +2070,9 @@
           </a:lstStyle>
           <a:p>
             <a:r>
-              <a:rPr lang="ja-JP" altLang="en-US" smtClean="0"/>
+              <a:rPr lang="ja-JP" altLang="en-US"/>
               <a:t>マスタ タイトルの書式設定</a:t>
             </a:r>
-            <a:endParaRPr lang="ja-JP" altLang="en-US"/>
           </a:p>
         </p:txBody>
       </p:sp>
@@ -2128,7 +2135,7 @@
           <a:p>
             <a:pPr lvl="0"/>
             <a:r>
-              <a:rPr lang="ja-JP" altLang="en-US" smtClean="0"/>
+              <a:rPr lang="ja-JP" altLang="en-US"/>
               <a:t>マスタ テキストの書式設定</a:t>
             </a:r>
           </a:p>
@@ -2271,10 +2278,9 @@
           <a:lstStyle/>
           <a:p>
             <a:r>
-              <a:rPr lang="ja-JP" altLang="en-US" smtClean="0"/>
+              <a:rPr lang="ja-JP" altLang="en-US"/>
               <a:t>マスタ タイトルの書式設定</a:t>
             </a:r>
-            <a:endParaRPr lang="ja-JP" altLang="en-US"/>
           </a:p>
         </p:txBody>
       </p:sp>
@@ -2328,70 +2334,69 @@
           <a:p>
             <a:pPr lvl="0"/>
             <a:r>
-              <a:rPr lang="ja-JP" altLang="en-US" smtClean="0"/>
+              <a:rPr lang="ja-JP" altLang="en-US"/>
               <a:t>マスタ テキストの書式設定</a:t>
             </a:r>
           </a:p>
           <a:p>
             <a:pPr lvl="1"/>
             <a:r>
-              <a:rPr lang="ja-JP" altLang="en-US" smtClean="0"/>
+              <a:rPr lang="ja-JP" altLang="en-US"/>
               <a:t>第 </a:t>
             </a:r>
             <a:r>
-              <a:rPr lang="en-US" altLang="ja-JP" smtClean="0"/>
+              <a:rPr lang="en-US" altLang="ja-JP"/>
               <a:t>2 </a:t>
             </a:r>
             <a:r>
-              <a:rPr lang="ja-JP" altLang="en-US" smtClean="0"/>
+              <a:rPr lang="ja-JP" altLang="en-US"/>
               <a:t>レベル</a:t>
             </a:r>
           </a:p>
           <a:p>
             <a:pPr lvl="2"/>
             <a:r>
-              <a:rPr lang="ja-JP" altLang="en-US" smtClean="0"/>
+              <a:rPr lang="ja-JP" altLang="en-US"/>
               <a:t>第 </a:t>
             </a:r>
             <a:r>
-              <a:rPr lang="en-US" altLang="ja-JP" smtClean="0"/>
+              <a:rPr lang="en-US" altLang="ja-JP"/>
               <a:t>3 </a:t>
             </a:r>
             <a:r>
-              <a:rPr lang="ja-JP" altLang="en-US" smtClean="0"/>
+              <a:rPr lang="ja-JP" altLang="en-US"/>
               <a:t>レベル</a:t>
             </a:r>
           </a:p>
           <a:p>
             <a:pPr lvl="3"/>
             <a:r>
-              <a:rPr lang="ja-JP" altLang="en-US" smtClean="0"/>
+              <a:rPr lang="ja-JP" altLang="en-US"/>
               <a:t>第 </a:t>
             </a:r>
             <a:r>
-              <a:rPr lang="en-US" altLang="ja-JP" smtClean="0"/>
+              <a:rPr lang="en-US" altLang="ja-JP"/>
               <a:t>4 </a:t>
             </a:r>
             <a:r>
-              <a:rPr lang="ja-JP" altLang="en-US" smtClean="0"/>
+              <a:rPr lang="ja-JP" altLang="en-US"/>
               <a:t>レベル</a:t>
             </a:r>
           </a:p>
           <a:p>
             <a:pPr lvl="4"/>
             <a:r>
-              <a:rPr lang="ja-JP" altLang="en-US" smtClean="0"/>
+              <a:rPr lang="ja-JP" altLang="en-US"/>
               <a:t>第 </a:t>
             </a:r>
             <a:r>
-              <a:rPr lang="en-US" altLang="ja-JP" smtClean="0"/>
+              <a:rPr lang="en-US" altLang="ja-JP"/>
               <a:t>5 </a:t>
             </a:r>
             <a:r>
-              <a:rPr lang="ja-JP" altLang="en-US" smtClean="0"/>
+              <a:rPr lang="ja-JP" altLang="en-US"/>
               <a:t>レベル</a:t>
             </a:r>
-            <a:endParaRPr lang="ja-JP" altLang="en-US"/>
           </a:p>
         </p:txBody>
       </p:sp>
@@ -2445,70 +2450,69 @@
           <a:p>
             <a:pPr lvl="0"/>
             <a:r>
-              <a:rPr lang="ja-JP" altLang="en-US" smtClean="0"/>
+              <a:rPr lang="ja-JP" altLang="en-US"/>
               <a:t>マスタ テキストの書式設定</a:t>
             </a:r>
           </a:p>
           <a:p>
             <a:pPr lvl="1"/>
             <a:r>
-              <a:rPr lang="ja-JP" altLang="en-US" smtClean="0"/>
+              <a:rPr lang="ja-JP" altLang="en-US"/>
               <a:t>第 </a:t>
             </a:r>
             <a:r>
-              <a:rPr lang="en-US" altLang="ja-JP" smtClean="0"/>
+              <a:rPr lang="en-US" altLang="ja-JP"/>
               <a:t>2 </a:t>
             </a:r>
             <a:r>
-              <a:rPr lang="ja-JP" altLang="en-US" smtClean="0"/>
+              <a:rPr lang="ja-JP" altLang="en-US"/>
               <a:t>レベル</a:t>
             </a:r>
           </a:p>
           <a:p>
             <a:pPr lvl="2"/>
             <a:r>
-              <a:rPr lang="ja-JP" altLang="en-US" smtClean="0"/>
+              <a:rPr lang="ja-JP" altLang="en-US"/>
               <a:t>第 </a:t>
             </a:r>
             <a:r>
-              <a:rPr lang="en-US" altLang="ja-JP" smtClean="0"/>
+              <a:rPr lang="en-US" altLang="ja-JP"/>
               <a:t>3 </a:t>
             </a:r>
             <a:r>
-              <a:rPr lang="ja-JP" altLang="en-US" smtClean="0"/>
+              <a:rPr lang="ja-JP" altLang="en-US"/>
               <a:t>レベル</a:t>
             </a:r>
           </a:p>
           <a:p>
             <a:pPr lvl="3"/>
             <a:r>
-              <a:rPr lang="ja-JP" altLang="en-US" smtClean="0"/>
+              <a:rPr lang="ja-JP" altLang="en-US"/>
               <a:t>第 </a:t>
             </a:r>
             <a:r>
-              <a:rPr lang="en-US" altLang="ja-JP" smtClean="0"/>
+              <a:rPr lang="en-US" altLang="ja-JP"/>
               <a:t>4 </a:t>
             </a:r>
             <a:r>
-              <a:rPr lang="ja-JP" altLang="en-US" smtClean="0"/>
+              <a:rPr lang="ja-JP" altLang="en-US"/>
               <a:t>レベル</a:t>
             </a:r>
           </a:p>
           <a:p>
             <a:pPr lvl="4"/>
             <a:r>
-              <a:rPr lang="ja-JP" altLang="en-US" smtClean="0"/>
+              <a:rPr lang="ja-JP" altLang="en-US"/>
               <a:t>第 </a:t>
             </a:r>
             <a:r>
-              <a:rPr lang="en-US" altLang="ja-JP" smtClean="0"/>
+              <a:rPr lang="en-US" altLang="ja-JP"/>
               <a:t>5 </a:t>
             </a:r>
             <a:r>
-              <a:rPr lang="ja-JP" altLang="en-US" smtClean="0"/>
+              <a:rPr lang="ja-JP" altLang="en-US"/>
               <a:t>レベル</a:t>
             </a:r>
-            <a:endParaRPr lang="ja-JP" altLang="en-US"/>
           </a:p>
         </p:txBody>
       </p:sp>
@@ -2658,10 +2662,9 @@
           </a:lstStyle>
           <a:p>
             <a:r>
-              <a:rPr lang="ja-JP" altLang="en-US" smtClean="0"/>
+              <a:rPr lang="ja-JP" altLang="en-US"/>
               <a:t>マスタ タイトルの書式設定</a:t>
             </a:r>
-            <a:endParaRPr lang="ja-JP" altLang="en-US"/>
           </a:p>
         </p:txBody>
       </p:sp>
@@ -2724,7 +2727,7 @@
           <a:p>
             <a:pPr lvl="0"/>
             <a:r>
-              <a:rPr lang="ja-JP" altLang="en-US" smtClean="0"/>
+              <a:rPr lang="ja-JP" altLang="en-US"/>
               <a:t>マスタ テキストの書式設定</a:t>
             </a:r>
           </a:p>
@@ -2780,70 +2783,69 @@
           <a:p>
             <a:pPr lvl="0"/>
             <a:r>
-              <a:rPr lang="ja-JP" altLang="en-US" smtClean="0"/>
+              <a:rPr lang="ja-JP" altLang="en-US"/>
               <a:t>マスタ テキストの書式設定</a:t>
             </a:r>
           </a:p>
           <a:p>
             <a:pPr lvl="1"/>
             <a:r>
-              <a:rPr lang="ja-JP" altLang="en-US" smtClean="0"/>
+              <a:rPr lang="ja-JP" altLang="en-US"/>
               <a:t>第 </a:t>
             </a:r>
             <a:r>
-              <a:rPr lang="en-US" altLang="ja-JP" smtClean="0"/>
+              <a:rPr lang="en-US" altLang="ja-JP"/>
               <a:t>2 </a:t>
             </a:r>
             <a:r>
-              <a:rPr lang="ja-JP" altLang="en-US" smtClean="0"/>
+              <a:rPr lang="ja-JP" altLang="en-US"/>
               <a:t>レベル</a:t>
             </a:r>
           </a:p>
           <a:p>
             <a:pPr lvl="2"/>
             <a:r>
-              <a:rPr lang="ja-JP" altLang="en-US" smtClean="0"/>
+              <a:rPr lang="ja-JP" altLang="en-US"/>
               <a:t>第 </a:t>
             </a:r>
             <a:r>
-              <a:rPr lang="en-US" altLang="ja-JP" smtClean="0"/>
+              <a:rPr lang="en-US" altLang="ja-JP"/>
               <a:t>3 </a:t>
             </a:r>
             <a:r>
-              <a:rPr lang="ja-JP" altLang="en-US" smtClean="0"/>
+              <a:rPr lang="ja-JP" altLang="en-US"/>
               <a:t>レベル</a:t>
             </a:r>
           </a:p>
           <a:p>
             <a:pPr lvl="3"/>
             <a:r>
-              <a:rPr lang="ja-JP" altLang="en-US" smtClean="0"/>
+              <a:rPr lang="ja-JP" altLang="en-US"/>
               <a:t>第 </a:t>
             </a:r>
             <a:r>
-              <a:rPr lang="en-US" altLang="ja-JP" smtClean="0"/>
+              <a:rPr lang="en-US" altLang="ja-JP"/>
               <a:t>4 </a:t>
             </a:r>
             <a:r>
-              <a:rPr lang="ja-JP" altLang="en-US" smtClean="0"/>
+              <a:rPr lang="ja-JP" altLang="en-US"/>
               <a:t>レベル</a:t>
             </a:r>
           </a:p>
           <a:p>
             <a:pPr lvl="4"/>
             <a:r>
-              <a:rPr lang="ja-JP" altLang="en-US" smtClean="0"/>
+              <a:rPr lang="ja-JP" altLang="en-US"/>
               <a:t>第 </a:t>
             </a:r>
             <a:r>
-              <a:rPr lang="en-US" altLang="ja-JP" smtClean="0"/>
+              <a:rPr lang="en-US" altLang="ja-JP"/>
               <a:t>5 </a:t>
             </a:r>
             <a:r>
-              <a:rPr lang="ja-JP" altLang="en-US" smtClean="0"/>
+              <a:rPr lang="ja-JP" altLang="en-US"/>
               <a:t>レベル</a:t>
             </a:r>
-            <a:endParaRPr lang="ja-JP" altLang="en-US"/>
           </a:p>
         </p:txBody>
       </p:sp>
@@ -2906,7 +2908,7 @@
           <a:p>
             <a:pPr lvl="0"/>
             <a:r>
-              <a:rPr lang="ja-JP" altLang="en-US" smtClean="0"/>
+              <a:rPr lang="ja-JP" altLang="en-US"/>
               <a:t>マスタ テキストの書式設定</a:t>
             </a:r>
           </a:p>
@@ -2962,70 +2964,69 @@
           <a:p>
             <a:pPr lvl="0"/>
             <a:r>
-              <a:rPr lang="ja-JP" altLang="en-US" smtClean="0"/>
+              <a:rPr lang="ja-JP" altLang="en-US"/>
               <a:t>マスタ テキストの書式設定</a:t>
             </a:r>
           </a:p>
           <a:p>
             <a:pPr lvl="1"/>
             <a:r>
-              <a:rPr lang="ja-JP" altLang="en-US" smtClean="0"/>
+              <a:rPr lang="ja-JP" altLang="en-US"/>
               <a:t>第 </a:t>
             </a:r>
             <a:r>
-              <a:rPr lang="en-US" altLang="ja-JP" smtClean="0"/>
+              <a:rPr lang="en-US" altLang="ja-JP"/>
               <a:t>2 </a:t>
             </a:r>
             <a:r>
-              <a:rPr lang="ja-JP" altLang="en-US" smtClean="0"/>
+              <a:rPr lang="ja-JP" altLang="en-US"/>
               <a:t>レベル</a:t>
             </a:r>
           </a:p>
           <a:p>
             <a:pPr lvl="2"/>
             <a:r>
-              <a:rPr lang="ja-JP" altLang="en-US" smtClean="0"/>
+              <a:rPr lang="ja-JP" altLang="en-US"/>
               <a:t>第 </a:t>
             </a:r>
             <a:r>
-              <a:rPr lang="en-US" altLang="ja-JP" smtClean="0"/>
+              <a:rPr lang="en-US" altLang="ja-JP"/>
               <a:t>3 </a:t>
             </a:r>
             <a:r>
-              <a:rPr lang="ja-JP" altLang="en-US" smtClean="0"/>
+              <a:rPr lang="ja-JP" altLang="en-US"/>
               <a:t>レベル</a:t>
             </a:r>
           </a:p>
           <a:p>
             <a:pPr lvl="3"/>
             <a:r>
-              <a:rPr lang="ja-JP" altLang="en-US" smtClean="0"/>
+              <a:rPr lang="ja-JP" altLang="en-US"/>
               <a:t>第 </a:t>
             </a:r>
             <a:r>
-              <a:rPr lang="en-US" altLang="ja-JP" smtClean="0"/>
+              <a:rPr lang="en-US" altLang="ja-JP"/>
               <a:t>4 </a:t>
             </a:r>
             <a:r>
-              <a:rPr lang="ja-JP" altLang="en-US" smtClean="0"/>
+              <a:rPr lang="ja-JP" altLang="en-US"/>
               <a:t>レベル</a:t>
             </a:r>
           </a:p>
           <a:p>
             <a:pPr lvl="4"/>
             <a:r>
-              <a:rPr lang="ja-JP" altLang="en-US" smtClean="0"/>
+              <a:rPr lang="ja-JP" altLang="en-US"/>
               <a:t>第 </a:t>
             </a:r>
             <a:r>
-              <a:rPr lang="en-US" altLang="ja-JP" smtClean="0"/>
+              <a:rPr lang="en-US" altLang="ja-JP"/>
               <a:t>5 </a:t>
             </a:r>
             <a:r>
-              <a:rPr lang="ja-JP" altLang="en-US" smtClean="0"/>
+              <a:rPr lang="ja-JP" altLang="en-US"/>
               <a:t>レベル</a:t>
             </a:r>
-            <a:endParaRPr lang="ja-JP" altLang="en-US"/>
           </a:p>
         </p:txBody>
       </p:sp>
@@ -3166,10 +3167,9 @@
           <a:lstStyle/>
           <a:p>
             <a:r>
-              <a:rPr lang="ja-JP" altLang="en-US" smtClean="0"/>
+              <a:rPr lang="ja-JP" altLang="en-US"/>
               <a:t>マスタ タイトルの書式設定</a:t>
             </a:r>
-            <a:endParaRPr lang="ja-JP" altLang="en-US"/>
           </a:p>
         </p:txBody>
       </p:sp>
@@ -3440,10 +3440,9 @@
           </a:lstStyle>
           <a:p>
             <a:r>
-              <a:rPr lang="ja-JP" altLang="en-US" smtClean="0"/>
+              <a:rPr lang="ja-JP" altLang="en-US"/>
               <a:t>マスタ タイトルの書式設定</a:t>
             </a:r>
-            <a:endParaRPr lang="ja-JP" altLang="en-US"/>
           </a:p>
         </p:txBody>
       </p:sp>
@@ -3497,70 +3496,69 @@
           <a:p>
             <a:pPr lvl="0"/>
             <a:r>
-              <a:rPr lang="ja-JP" altLang="en-US" smtClean="0"/>
+              <a:rPr lang="ja-JP" altLang="en-US"/>
               <a:t>マスタ テキストの書式設定</a:t>
             </a:r>
           </a:p>
           <a:p>
             <a:pPr lvl="1"/>
             <a:r>
-              <a:rPr lang="ja-JP" altLang="en-US" smtClean="0"/>
+              <a:rPr lang="ja-JP" altLang="en-US"/>
               <a:t>第 </a:t>
             </a:r>
             <a:r>
-              <a:rPr lang="en-US" altLang="ja-JP" smtClean="0"/>
+              <a:rPr lang="en-US" altLang="ja-JP"/>
               <a:t>2 </a:t>
             </a:r>
             <a:r>
-              <a:rPr lang="ja-JP" altLang="en-US" smtClean="0"/>
+              <a:rPr lang="ja-JP" altLang="en-US"/>
               <a:t>レベル</a:t>
             </a:r>
           </a:p>
           <a:p>
             <a:pPr lvl="2"/>
             <a:r>
-              <a:rPr lang="ja-JP" altLang="en-US" smtClean="0"/>
+              <a:rPr lang="ja-JP" altLang="en-US"/>
               <a:t>第 </a:t>
             </a:r>
             <a:r>
-              <a:rPr lang="en-US" altLang="ja-JP" smtClean="0"/>
+              <a:rPr lang="en-US" altLang="ja-JP"/>
               <a:t>3 </a:t>
             </a:r>
             <a:r>
-              <a:rPr lang="ja-JP" altLang="en-US" smtClean="0"/>
+              <a:rPr lang="ja-JP" altLang="en-US"/>
               <a:t>レベル</a:t>
             </a:r>
           </a:p>
           <a:p>
             <a:pPr lvl="3"/>
             <a:r>
-              <a:rPr lang="ja-JP" altLang="en-US" smtClean="0"/>
+              <a:rPr lang="ja-JP" altLang="en-US"/>
               <a:t>第 </a:t>
             </a:r>
             <a:r>
-              <a:rPr lang="en-US" altLang="ja-JP" smtClean="0"/>
+              <a:rPr lang="en-US" altLang="ja-JP"/>
               <a:t>4 </a:t>
             </a:r>
             <a:r>
-              <a:rPr lang="ja-JP" altLang="en-US" smtClean="0"/>
+              <a:rPr lang="ja-JP" altLang="en-US"/>
               <a:t>レベル</a:t>
             </a:r>
           </a:p>
           <a:p>
             <a:pPr lvl="4"/>
             <a:r>
-              <a:rPr lang="ja-JP" altLang="en-US" smtClean="0"/>
+              <a:rPr lang="ja-JP" altLang="en-US"/>
               <a:t>第 </a:t>
             </a:r>
             <a:r>
-              <a:rPr lang="en-US" altLang="ja-JP" smtClean="0"/>
+              <a:rPr lang="en-US" altLang="ja-JP"/>
               <a:t>5 </a:t>
             </a:r>
             <a:r>
-              <a:rPr lang="ja-JP" altLang="en-US" smtClean="0"/>
+              <a:rPr lang="ja-JP" altLang="en-US"/>
               <a:t>レベル</a:t>
             </a:r>
-            <a:endParaRPr lang="ja-JP" altLang="en-US"/>
           </a:p>
         </p:txBody>
       </p:sp>
@@ -3623,7 +3621,7 @@
           <a:p>
             <a:pPr lvl="0"/>
             <a:r>
-              <a:rPr lang="ja-JP" altLang="en-US" smtClean="0"/>
+              <a:rPr lang="ja-JP" altLang="en-US"/>
               <a:t>マスタ テキストの書式設定</a:t>
             </a:r>
           </a:p>
@@ -3775,10 +3773,9 @@
           </a:lstStyle>
           <a:p>
             <a:r>
-              <a:rPr lang="ja-JP" altLang="en-US" smtClean="0"/>
+              <a:rPr lang="ja-JP" altLang="en-US"/>
               <a:t>マスタ タイトルの書式設定</a:t>
             </a:r>
-            <a:endParaRPr lang="ja-JP" altLang="en-US"/>
           </a:p>
         </p:txBody>
       </p:sp>
@@ -3840,7 +3837,7 @@
           </a:lstStyle>
           <a:p>
             <a:pPr lvl="0"/>
-            <a:endParaRPr lang="ja-JP" altLang="en-US" noProof="0" smtClean="0"/>
+            <a:endParaRPr lang="ja-JP" altLang="en-US" noProof="0"/>
           </a:p>
         </p:txBody>
       </p:sp>
@@ -3903,7 +3900,7 @@
           <a:p>
             <a:pPr lvl="0"/>
             <a:r>
-              <a:rPr lang="ja-JP" altLang="en-US" smtClean="0"/>
+              <a:rPr lang="ja-JP" altLang="en-US"/>
               <a:t>マスタ テキストの書式設定</a:t>
             </a:r>
           </a:p>
@@ -4062,14 +4059,14 @@
           </a:ln>
           <a:extLst>
             <a:ext uri="{909E8E84-426E-40dd-AFC4-6F175D3DCCD1}">
-              <a14:hiddenFill xmlns:a14="http://schemas.microsoft.com/office/drawing/2010/main">
+              <a14:hiddenFill xmlns:a14="http://schemas.microsoft.com/office/drawing/2010/main" xmlns="">
                 <a:solidFill>
                   <a:srgbClr val="FFFFFF"/>
                 </a:solidFill>
               </a14:hiddenFill>
             </a:ext>
             <a:ext uri="{91240B29-F687-4f45-9708-019B960494DF}">
-              <a14:hiddenLine xmlns:a14="http://schemas.microsoft.com/office/drawing/2010/main" w="9525">
+              <a14:hiddenLine xmlns:a14="http://schemas.microsoft.com/office/drawing/2010/main" xmlns="" w="9525">
                 <a:solidFill>
                   <a:srgbClr val="000000"/>
                 </a:solidFill>
@@ -4079,7 +4076,7 @@
               </a14:hiddenLine>
             </a:ext>
             <a:ext uri="{FAA26D3D-D897-4be2-8F04-BA451C77F1D7}">
-              <ma14:placeholderFlag xmlns:ma14="http://schemas.microsoft.com/office/mac/drawingml/2011/main" val="1"/>
+              <ma14:placeholderFlag xmlns:ma14="http://schemas.microsoft.com/office/mac/drawingml/2011/main" xmlns="" val="1"/>
             </a:ext>
           </a:extLst>
         </p:spPr>
@@ -4123,14 +4120,14 @@
           </a:ln>
           <a:extLst>
             <a:ext uri="{909E8E84-426E-40dd-AFC4-6F175D3DCCD1}">
-              <a14:hiddenFill xmlns:a14="http://schemas.microsoft.com/office/drawing/2010/main">
+              <a14:hiddenFill xmlns:a14="http://schemas.microsoft.com/office/drawing/2010/main" xmlns="">
                 <a:solidFill>
                   <a:srgbClr val="FFFFFF"/>
                 </a:solidFill>
               </a14:hiddenFill>
             </a:ext>
             <a:ext uri="{91240B29-F687-4f45-9708-019B960494DF}">
-              <a14:hiddenLine xmlns:a14="http://schemas.microsoft.com/office/drawing/2010/main" w="9525">
+              <a14:hiddenLine xmlns:a14="http://schemas.microsoft.com/office/drawing/2010/main" xmlns="" w="9525">
                 <a:solidFill>
                   <a:srgbClr val="000000"/>
                 </a:solidFill>
@@ -4140,7 +4137,7 @@
               </a14:hiddenLine>
             </a:ext>
             <a:ext uri="{FAA26D3D-D897-4be2-8F04-BA451C77F1D7}">
-              <ma14:placeholderFlag xmlns:ma14="http://schemas.microsoft.com/office/mac/drawingml/2011/main" val="1"/>
+              <ma14:placeholderFlag xmlns:ma14="http://schemas.microsoft.com/office/mac/drawingml/2011/main" xmlns="" val="1"/>
             </a:ext>
           </a:extLst>
         </p:spPr>
@@ -4816,30 +4813,16 @@
                 <a:latin typeface="Arial" charset="0"/>
                 <a:ea typeface="ＭＳ Ｐゴシック" charset="0"/>
               </a:rPr>
-              <a:t>プログラミング</a:t>
-            </a:r>
-            <a:r>
-              <a:rPr lang="ja-JP" altLang="en-US" dirty="0" smtClean="0">
-                <a:latin typeface="Arial" charset="0"/>
-                <a:ea typeface="ＭＳ Ｐゴシック" charset="0"/>
-              </a:rPr>
-              <a:t>言語論</a:t>
-            </a:r>
-            <a:r>
-              <a:rPr lang="en-US" altLang="ja-JP" dirty="0" smtClean="0">
-                <a:latin typeface="Arial" charset="0"/>
-                <a:ea typeface="ＭＳ Ｐゴシック" charset="0"/>
-              </a:rPr>
-              <a:t/>
+              <a:t>プログラミング言語論</a:t>
             </a:r>
             <a:br>
-              <a:rPr lang="en-US" altLang="ja-JP" dirty="0" smtClean="0">
+              <a:rPr lang="en-US" altLang="ja-JP" dirty="0">
                 <a:latin typeface="Arial" charset="0"/>
                 <a:ea typeface="ＭＳ Ｐゴシック" charset="0"/>
               </a:rPr>
             </a:br>
             <a:r>
-              <a:rPr lang="ja-JP" altLang="en-US" dirty="0" smtClean="0">
+              <a:rPr lang="ja-JP" altLang="en-US" dirty="0">
                 <a:latin typeface="Arial" charset="0"/>
                 <a:ea typeface="ＭＳ Ｐゴシック" charset="0"/>
               </a:rPr>
@@ -4864,7 +4847,7 @@
         </p:nvSpPr>
         <p:spPr>
           <a:xfrm>
-            <a:off x="1643063" y="4786313"/>
+            <a:off x="1714500" y="4797152"/>
             <a:ext cx="5715000" cy="642937"/>
           </a:xfrm>
         </p:spPr>
@@ -4878,7 +4861,7 @@
                 <a:latin typeface="Arial" charset="0"/>
                 <a:ea typeface="ＭＳ Ｐゴシック" charset="0"/>
               </a:rPr>
-              <a:t>情報工学科　篠埜　功</a:t>
+              <a:t>篠埜　功</a:t>
             </a:r>
           </a:p>
         </p:txBody>
@@ -4905,14 +4888,14 @@
           </a:ln>
           <a:extLst>
             <a:ext uri="{909E8E84-426E-40dd-AFC4-6F175D3DCCD1}">
-              <a14:hiddenFill xmlns:a14="http://schemas.microsoft.com/office/drawing/2010/main">
+              <a14:hiddenFill xmlns:a14="http://schemas.microsoft.com/office/drawing/2010/main" xmlns="">
                 <a:solidFill>
                   <a:srgbClr val="FFFFFF"/>
                 </a:solidFill>
               </a14:hiddenFill>
             </a:ext>
             <a:ext uri="{91240B29-F687-4f45-9708-019B960494DF}">
-              <a14:hiddenLine xmlns:a14="http://schemas.microsoft.com/office/drawing/2010/main" w="9525">
+              <a14:hiddenLine xmlns:a14="http://schemas.microsoft.com/office/drawing/2010/main" xmlns="" w="9525">
                 <a:solidFill>
                   <a:srgbClr val="000000"/>
                 </a:solidFill>
@@ -4931,7 +4914,7 @@
           <a:p>
             <a:pPr algn="ctr"/>
             <a:r>
-              <a:rPr lang="ja-JP" altLang="en-US" sz="3200" b="0" dirty="0" smtClean="0"/>
+              <a:rPr lang="ja-JP" altLang="en-US" sz="3200" b="0" dirty="0"/>
               <a:t>第</a:t>
             </a:r>
             <a:r>
@@ -4939,12 +4922,8 @@
               <a:t>8</a:t>
             </a:r>
             <a:r>
-              <a:rPr lang="ja-JP" altLang="en-US" sz="3200" b="0" dirty="0" smtClean="0"/>
-              <a:t>回</a:t>
-            </a:r>
-            <a:r>
               <a:rPr lang="ja-JP" altLang="en-US" sz="3200" b="0" dirty="0"/>
-              <a:t>　型</a:t>
+              <a:t>回　型</a:t>
             </a:r>
             <a:endParaRPr lang="en-US" altLang="ja-JP" sz="3200" b="0" dirty="0"/>
           </a:p>
@@ -4955,13 +4934,6 @@
   <p:clrMapOvr>
     <a:masterClrMapping/>
   </p:clrMapOvr>
-  <p:timing>
-    <p:tnLst>
-      <p:par>
-        <p:cTn xmlns:p14="http://schemas.microsoft.com/office/powerpoint/2010/main" id="1" dur="indefinite" restart="never" nodeType="tmRoot"/>
-      </p:par>
-    </p:tnLst>
-  </p:timing>
 </p:sld>
 </file>
 
@@ -5034,14 +5006,14 @@
           </a:ln>
           <a:extLst>
             <a:ext uri="{909E8E84-426E-40dd-AFC4-6F175D3DCCD1}">
-              <a14:hiddenFill xmlns:a14="http://schemas.microsoft.com/office/drawing/2010/main">
+              <a14:hiddenFill xmlns:a14="http://schemas.microsoft.com/office/drawing/2010/main" xmlns="">
                 <a:solidFill>
                   <a:srgbClr val="FFFFFF"/>
                 </a:solidFill>
               </a14:hiddenFill>
             </a:ext>
             <a:ext uri="{91240B29-F687-4f45-9708-019B960494DF}">
-              <a14:hiddenLine xmlns:a14="http://schemas.microsoft.com/office/drawing/2010/main" w="9525">
+              <a14:hiddenLine xmlns:a14="http://schemas.microsoft.com/office/drawing/2010/main" xmlns="" w="9525">
                 <a:solidFill>
                   <a:srgbClr val="000000"/>
                 </a:solidFill>
@@ -5115,14 +5087,14 @@
           </a:ln>
           <a:extLst>
             <a:ext uri="{909E8E84-426E-40dd-AFC4-6F175D3DCCD1}">
-              <a14:hiddenFill xmlns:a14="http://schemas.microsoft.com/office/drawing/2010/main">
+              <a14:hiddenFill xmlns:a14="http://schemas.microsoft.com/office/drawing/2010/main" xmlns="">
                 <a:solidFill>
                   <a:srgbClr val="FFFFFF"/>
                 </a:solidFill>
               </a14:hiddenFill>
             </a:ext>
             <a:ext uri="{91240B29-F687-4f45-9708-019B960494DF}">
-              <a14:hiddenLine xmlns:a14="http://schemas.microsoft.com/office/drawing/2010/main" w="9525">
+              <a14:hiddenLine xmlns:a14="http://schemas.microsoft.com/office/drawing/2010/main" xmlns="" w="9525">
                 <a:solidFill>
                   <a:srgbClr val="000000"/>
                 </a:solidFill>
@@ -5256,55 +5228,35 @@
             </a:r>
             <a:r>
               <a:rPr lang="en-US" sz="2800" b="0" dirty="0"/>
-              <a:t>は</a:t>
-            </a:r>
-            <a:r>
-              <a:rPr lang="en-US" sz="2800" b="0" dirty="0" smtClean="0"/>
-              <a:t>、</a:t>
-            </a:r>
-            <a:r>
-              <a:rPr lang="en-US" altLang="ja-JP" sz="2800" b="0" dirty="0" smtClean="0"/>
-              <a:t>e1 </a:t>
+              <a:t>は、</a:t>
             </a:r>
             <a:r>
               <a:rPr lang="en-US" altLang="ja-JP" sz="2800" b="0" dirty="0"/>
-              <a:t>[e2] = *(e1 + e2)  </a:t>
-            </a:r>
-            <a:r>
-              <a:rPr lang="ja-JP" altLang="en-US" sz="2800" b="0" dirty="0" smtClean="0"/>
+              <a:t>e1 [e2] = *(e1 + e2)  </a:t>
+            </a:r>
+            <a:r>
+              <a:rPr lang="ja-JP" altLang="en-US" sz="2800" b="0" dirty="0"/>
               <a:t>（</a:t>
             </a:r>
             <a:r>
-              <a:rPr lang="en-US" altLang="ja-JP" sz="2800" b="0" dirty="0" smtClean="0"/>
-              <a:t>syntax </a:t>
-            </a:r>
-            <a:r>
               <a:rPr lang="en-US" altLang="ja-JP" sz="2800" b="0" dirty="0"/>
-              <a:t>sugar, </a:t>
+              <a:t>syntax sugar, </a:t>
             </a:r>
             <a:r>
               <a:rPr lang="ja-JP" altLang="en-US" sz="2800" b="0" dirty="0"/>
-              <a:t>プロ</a:t>
-            </a:r>
-            <a:r>
-              <a:rPr lang="ja-JP" altLang="en-US" sz="2800" b="0" dirty="0" smtClean="0"/>
-              <a:t>入</a:t>
-            </a:r>
-            <a:r>
-              <a:rPr lang="en-US" altLang="ja-JP" sz="2800" b="0" dirty="0" smtClean="0"/>
+              <a:t>プロ入</a:t>
+            </a:r>
+            <a:r>
+              <a:rPr lang="en-US" altLang="ja-JP" sz="2800" b="0" dirty="0"/>
               <a:t>2</a:t>
             </a:r>
             <a:r>
-              <a:rPr lang="ja-JP" altLang="en-US" sz="2800" b="0" dirty="0" smtClean="0"/>
+              <a:rPr lang="ja-JP" altLang="en-US" sz="2800" b="0" dirty="0"/>
               <a:t>で説明済）および</a:t>
             </a:r>
             <a:r>
-              <a:rPr lang="en-US" altLang="ja-JP" sz="2800" b="0" dirty="0" smtClean="0"/>
-              <a:t> </a:t>
-            </a:r>
-            <a:r>
               <a:rPr lang="en-US" altLang="ja-JP" sz="2800" b="0" dirty="0"/>
-              <a:t>&amp;(*e) = e </a:t>
+              <a:t> &amp;(*e) = e </a:t>
             </a:r>
             <a:r>
               <a:rPr lang="ja-JP" altLang="en-US" sz="2800" b="0" dirty="0"/>
@@ -5447,13 +5399,6 @@
   <p:clrMapOvr>
     <a:masterClrMapping/>
   </p:clrMapOvr>
-  <p:timing>
-    <p:tnLst>
-      <p:par>
-        <p:cTn xmlns:p14="http://schemas.microsoft.com/office/powerpoint/2010/main" id="1" dur="indefinite" restart="never" nodeType="tmRoot"/>
-      </p:par>
-    </p:tnLst>
-  </p:timing>
 </p:sld>
 </file>
 
